--- a/companies/calderwood-partners/Engagements/Carroll, Merritt and Williams/2009.05.22 - Briefing Deck - Carroll, Merritt and Williams.pptx
+++ b/companies/calderwood-partners/Engagements/Carroll, Merritt and Williams/2009.05.22 - Briefing Deck - Carroll, Merritt and Williams.pptx
@@ -3139,33 +3139,9 @@
             </a:r>
           </a:p>
           <a:p>
-            <a:pPr lvl="1"/>
-            <a:r>
-              <a:t>Client of record: Carroll, Merritt and Williams</a:t>
-            </a:r>
-          </a:p>
-          <a:p>
-            <a:pPr lvl="1"/>
-            <a:r>
-              <a:t>Engagement commenced April 22, 2009</a:t>
-            </a:r>
-          </a:p>
-          <a:p>
-            <a:pPr lvl="1"/>
-            <a:r>
-              <a:t>Prepared for Joseph Wallace, Chief Financial Officer</a:t>
-            </a:r>
-          </a:p>
-          <a:p>
-            <a:pPr lvl="1"/>
-            <a:r>
-              <a:t>Prepared by Daniel Leach, with Jason Torres and Mary Parker</a:t>
-            </a:r>
-          </a:p>
-          <a:p>
-            <a:pPr lvl="1"/>
-            <a:r>
-              <a:t>Status briefing, early phase of the engagement</a:t>
+            <a:pPr/>
+            <a:r>
+              <a:t>A briefing on the current-state review, prepared for Joseph Wallace and the finance leadership by the Calderwood engagement team.</a:t>
             </a:r>
           </a:p>
         </p:txBody>
@@ -3209,7 +3185,7 @@
                   <a:srgbClr val="4A2E2A"/>
                 </a:solidFill>
               </a:rPr>
-              <a:t>What this engagement will deliver</a:t>
+              <a:t>Where the engagement stands</a:t>
             </a:r>
           </a:p>
         </p:txBody>
@@ -3231,31 +3207,19 @@
           <a:p>
             <a:pPr lvl="1"/>
             <a:r>
-              <a:t>A single reconciled view of the combined company as it stands today</a:t>
+              <a:t>The engagement began on April 22, 2009 and is planned to run for about four months.</a:t>
             </a:r>
           </a:p>
           <a:p>
             <a:pPr lvl="1"/>
             <a:r>
-              <a:t>A cost baseline for the combined business, built from your own management accounts</a:t>
+              <a:t>We are in the opening phase, understanding how each of the two combined businesses runs today.</a:t>
             </a:r>
           </a:p>
           <a:p>
             <a:pPr lvl="1"/>
             <a:r>
-              <a:t>A target operating model for the functions in scope</a:t>
-            </a:r>
-          </a:p>
-          <a:p>
-            <a:pPr lvl="1"/>
-            <a:r>
-              <a:t>A prioritized plan for the first period after integration</a:t>
-            </a:r>
-          </a:p>
-          <a:p>
-            <a:pPr lvl="1"/>
-            <a:r>
-              <a:t>Findings and recommendations you can act on within the engagement term</a:t>
+              <a:t>Nothing is settled yet; today's purpose is to share what the review has surfaced and to agree the questions worth pursuing.</a:t>
             </a:r>
           </a:p>
         </p:txBody>
@@ -3299,7 +3263,7 @@
                   <a:srgbClr val="4A2E2A"/>
                 </a:solidFill>
               </a:rPr>
-              <a:t>How we are working</a:t>
+              <a:t>Your engagement team</a:t>
             </a:r>
           </a:p>
         </p:txBody>
@@ -3321,25 +3285,19 @@
           <a:p>
             <a:pPr lvl="1"/>
             <a:r>
-              <a:t>Findings first: every figure ties back to a workpaper we can produce on request</a:t>
+              <a:t>Jason Torres, Principal, owns the relationship and is your point of contact for any decision of substance.</a:t>
             </a:r>
           </a:p>
           <a:p>
             <a:pPr lvl="1"/>
             <a:r>
-              <a:t>Combined and legacy views shown side by side, not blended into a single number</a:t>
+              <a:t>Daniel Leach leads the current-state mapping and the combined cost baseline.</a:t>
             </a:r>
           </a:p>
           <a:p>
             <a:pPr lvl="1"/>
             <a:r>
-              <a:t>Interim results brought to you as they firm up, not held to the end</a:t>
-            </a:r>
-          </a:p>
-          <a:p>
-            <a:pPr lvl="1"/>
-            <a:r>
-              <a:t>Findings and recommendations kept separate and clearly labeled</a:t>
+              <a:t>Mary Parker leads the market and peer research that frames where the value lies.</a:t>
             </a:r>
           </a:p>
         </p:txBody>
@@ -3383,7 +3341,7 @@
                   <a:srgbClr val="4A2E2A"/>
                 </a:solidFill>
               </a:rPr>
-              <a:t>Where the work stands</a:t>
+              <a:t>What the review shows so far</a:t>
             </a:r>
           </a:p>
         </p:txBody>
@@ -3405,31 +3363,19 @@
           <a:p>
             <a:pPr lvl="1"/>
             <a:r>
-              <a:t>Headcount and reporting data reconciled across both legacy companies by Mary Parker</a:t>
+              <a:t>The two operating models overlap most in the shared support functions, which is where early consolidation is most likely to be considered.</a:t>
             </a:r>
           </a:p>
           <a:p>
             <a:pPr lvl="1"/>
             <a:r>
-              <a:t>Functional overlaps being mapped by Jason Torres and Daniel Leach</a:t>
+              <a:t>The combined cost baseline is largely assembled; a small number of finance schedules are still being reconciled with your team.</a:t>
             </a:r>
           </a:p>
           <a:p>
             <a:pPr lvl="1"/>
             <a:r>
-              <a:t>Cost baseline underway; the acquired-company accounts are now in hand</a:t>
-            </a:r>
-          </a:p>
-          <a:p>
-            <a:pPr lvl="1"/>
-            <a:r>
-              <a:t>Overhead is defined differently by each company and needs to be settled</a:t>
-            </a:r>
-          </a:p>
-          <a:p>
-            <a:pPr lvl="1"/>
-            <a:r>
-              <a:t>No findings yet: this is an early status, not a result</a:t>
+              <a:t>Customer-facing operations differ more than either side expected, and will need care so that integration does not disturb what is working.</a:t>
             </a:r>
           </a:p>
         </p:txBody>
@@ -3473,7 +3419,7 @@
                   <a:srgbClr val="4A2E2A"/>
                 </a:solidFill>
               </a:rPr>
-              <a:t>What we need from you</a:t>
+              <a:t>The decisions ahead</a:t>
             </a:r>
           </a:p>
         </p:txBody>
@@ -3495,19 +3441,19 @@
           <a:p>
             <a:pPr lvl="1"/>
             <a:r>
-              <a:t>Confirmation of the in-scope function list</a:t>
+              <a:t>Which functions to combine first, and the sequence in which the organization can absorb the change.</a:t>
             </a:r>
           </a:p>
           <a:p>
             <a:pPr lvl="1"/>
             <a:r>
-              <a:t>Sign-off from your finance staff on the account definitions</a:t>
+              <a:t>Where the near-term savings are real, as against where they only appear on paper.</a:t>
             </a:r>
           </a:p>
           <a:p>
             <a:pPr lvl="1"/>
             <a:r>
-              <a:t>Access to the people who can answer questions on the acquired-company accounts</a:t>
+              <a:t>How to protect the parts of each business that are already performing while the integration proceeds.</a:t>
             </a:r>
           </a:p>
         </p:txBody>
@@ -3551,7 +3497,7 @@
                   <a:srgbClr val="4A2E2A"/>
                 </a:solidFill>
               </a:rPr>
-              <a:t>Next steps</a:t>
+              <a:t>Immediate next steps</a:t>
             </a:r>
           </a:p>
         </p:txBody>
@@ -3573,25 +3519,19 @@
           <a:p>
             <a:pPr lvl="1"/>
             <a:r>
-              <a:t>Close the cost baseline once the account definitions are confirmed</a:t>
+              <a:t>Close out the remaining finance schedules with Joseph Wallace's team this week.</a:t>
             </a:r>
           </a:p>
           <a:p>
             <a:pPr lvl="1"/>
             <a:r>
-              <a:t>Complete the functional overlap map for the in-scope functions</a:t>
+              <a:t>Hold the working session to review these findings in full.</a:t>
             </a:r>
           </a:p>
           <a:p>
             <a:pPr lvl="1"/>
             <a:r>
-              <a:t>Bring the first findings to the next working session, labeled as findings</a:t>
-            </a:r>
-          </a:p>
-          <a:p>
-            <a:pPr lvl="1"/>
-            <a:r>
-              <a:t>Continue routing requests through Joseph Wallace's office</a:t>
+              <a:t>Agree the two or three decisions the integration turns on, so the next phase can begin with a clear mandate.</a:t>
             </a:r>
           </a:p>
         </p:txBody>
